--- a/lab-expe-02/slide/Assistentes_IA_vs_Codificacao_Manual_Lab02.pptx
+++ b/lab-expe-02/slide/Assistentes_IA_vs_Codificacao_Manual_Lab02.pptx
@@ -4091,7 +4091,7 @@
                 <a:ea typeface="Calibri" pitchFamily="34" charset="-122"/>
                 <a:cs typeface="Calibri" pitchFamily="34" charset="-120"/>
               </a:rPr>
-              <a:t>Relatório: lab-expe-02/RELATORIO.md</a:t>
+              <a:t>Relatório: lab-expe-02/relatorio/RELATORIO.md</a:t>
             </a:r>
             <a:endParaRPr lang="en-US" sz="1600" dirty="0"/>
           </a:p>
